--- a/prezentace/Prezentace.pptx
+++ b/prezentace/Prezentace.pptx
@@ -115,6 +115,11 @@
       </a:defRPr>
     </a:lvl9pPr>
   </p:defaultTextStyle>
+  <p:extLst>
+    <p:ext uri="{EFAFB233-063F-42B5-8137-9DF3F51BA10A}">
+      <p15:sldGuideLst xmlns:p15="http://schemas.microsoft.com/office/powerpoint/2012/main"/>
+    </p:ext>
+  </p:extLst>
 </p:presentation>
 </file>
 
@@ -265,7 +270,7 @@
           <a:p>
             <a:fld id="{D17994E5-E8B5-4078-B5D0-406A6B42B036}" type="datetimeFigureOut">
               <a:rPr lang="cs-CZ" smtClean="0"/>
-              <a:t>01.12.2025</a:t>
+              <a:t>02.12.2025</a:t>
             </a:fld>
             <a:endParaRPr lang="cs-CZ"/>
           </a:p>
@@ -463,7 +468,7 @@
           <a:p>
             <a:fld id="{D17994E5-E8B5-4078-B5D0-406A6B42B036}" type="datetimeFigureOut">
               <a:rPr lang="cs-CZ" smtClean="0"/>
-              <a:t>01.12.2025</a:t>
+              <a:t>02.12.2025</a:t>
             </a:fld>
             <a:endParaRPr lang="cs-CZ"/>
           </a:p>
@@ -671,7 +676,7 @@
           <a:p>
             <a:fld id="{D17994E5-E8B5-4078-B5D0-406A6B42B036}" type="datetimeFigureOut">
               <a:rPr lang="cs-CZ" smtClean="0"/>
-              <a:t>01.12.2025</a:t>
+              <a:t>02.12.2025</a:t>
             </a:fld>
             <a:endParaRPr lang="cs-CZ"/>
           </a:p>
@@ -869,7 +874,7 @@
           <a:p>
             <a:fld id="{D17994E5-E8B5-4078-B5D0-406A6B42B036}" type="datetimeFigureOut">
               <a:rPr lang="cs-CZ" smtClean="0"/>
-              <a:t>01.12.2025</a:t>
+              <a:t>02.12.2025</a:t>
             </a:fld>
             <a:endParaRPr lang="cs-CZ"/>
           </a:p>
@@ -1144,7 +1149,7 @@
           <a:p>
             <a:fld id="{D17994E5-E8B5-4078-B5D0-406A6B42B036}" type="datetimeFigureOut">
               <a:rPr lang="cs-CZ" smtClean="0"/>
-              <a:t>01.12.2025</a:t>
+              <a:t>02.12.2025</a:t>
             </a:fld>
             <a:endParaRPr lang="cs-CZ"/>
           </a:p>
@@ -1409,7 +1414,7 @@
           <a:p>
             <a:fld id="{D17994E5-E8B5-4078-B5D0-406A6B42B036}" type="datetimeFigureOut">
               <a:rPr lang="cs-CZ" smtClean="0"/>
-              <a:t>01.12.2025</a:t>
+              <a:t>02.12.2025</a:t>
             </a:fld>
             <a:endParaRPr lang="cs-CZ"/>
           </a:p>
@@ -1821,7 +1826,7 @@
           <a:p>
             <a:fld id="{D17994E5-E8B5-4078-B5D0-406A6B42B036}" type="datetimeFigureOut">
               <a:rPr lang="cs-CZ" smtClean="0"/>
-              <a:t>01.12.2025</a:t>
+              <a:t>02.12.2025</a:t>
             </a:fld>
             <a:endParaRPr lang="cs-CZ"/>
           </a:p>
@@ -1962,7 +1967,7 @@
           <a:p>
             <a:fld id="{D17994E5-E8B5-4078-B5D0-406A6B42B036}" type="datetimeFigureOut">
               <a:rPr lang="cs-CZ" smtClean="0"/>
-              <a:t>01.12.2025</a:t>
+              <a:t>02.12.2025</a:t>
             </a:fld>
             <a:endParaRPr lang="cs-CZ"/>
           </a:p>
@@ -2075,7 +2080,7 @@
           <a:p>
             <a:fld id="{D17994E5-E8B5-4078-B5D0-406A6B42B036}" type="datetimeFigureOut">
               <a:rPr lang="cs-CZ" smtClean="0"/>
-              <a:t>01.12.2025</a:t>
+              <a:t>02.12.2025</a:t>
             </a:fld>
             <a:endParaRPr lang="cs-CZ"/>
           </a:p>
@@ -2386,7 +2391,7 @@
           <a:p>
             <a:fld id="{D17994E5-E8B5-4078-B5D0-406A6B42B036}" type="datetimeFigureOut">
               <a:rPr lang="cs-CZ" smtClean="0"/>
-              <a:t>01.12.2025</a:t>
+              <a:t>02.12.2025</a:t>
             </a:fld>
             <a:endParaRPr lang="cs-CZ"/>
           </a:p>
@@ -2674,7 +2679,7 @@
           <a:p>
             <a:fld id="{D17994E5-E8B5-4078-B5D0-406A6B42B036}" type="datetimeFigureOut">
               <a:rPr lang="cs-CZ" smtClean="0"/>
-              <a:t>01.12.2025</a:t>
+              <a:t>02.12.2025</a:t>
             </a:fld>
             <a:endParaRPr lang="cs-CZ"/>
           </a:p>
@@ -2915,7 +2920,7 @@
           <a:p>
             <a:fld id="{D17994E5-E8B5-4078-B5D0-406A6B42B036}" type="datetimeFigureOut">
               <a:rPr lang="cs-CZ" smtClean="0"/>
-              <a:t>01.12.2025</a:t>
+              <a:t>02.12.2025</a:t>
             </a:fld>
             <a:endParaRPr lang="cs-CZ"/>
           </a:p>
@@ -4258,10 +4263,10 @@
       </p:grpSpPr>
       <p:pic>
         <p:nvPicPr>
-          <p:cNvPr id="9" name="Zástupný obsah 8">
-            <a:extLst>
-              <a:ext uri="{FF2B5EF4-FFF2-40B4-BE49-F238E27FC236}">
-                <a16:creationId xmlns:a16="http://schemas.microsoft.com/office/drawing/2014/main" id="{3BDDA450-E48F-AD14-DFED-A39D2F4B17CC}"/>
+          <p:cNvPr id="6" name="Zástupný obsah 5">
+            <a:extLst>
+              <a:ext uri="{FF2B5EF4-FFF2-40B4-BE49-F238E27FC236}">
+                <a16:creationId xmlns:a16="http://schemas.microsoft.com/office/drawing/2014/main" id="{634EE328-049F-14B0-5321-6088B52385BF}"/>
               </a:ext>
             </a:extLst>
           </p:cNvPr>
@@ -4280,19 +4285,15 @@
               </a:ext>
             </a:extLst>
           </a:blip>
-          <a:srcRect t="622"/>
           <a:stretch>
             <a:fillRect/>
           </a:stretch>
         </p:blipFill>
         <p:spPr>
           <a:xfrm>
-            <a:off x="3159" y="452486"/>
-            <a:ext cx="12188841" cy="6405513"/>
+            <a:off x="505409" y="0"/>
+            <a:ext cx="11686591" cy="6858000"/>
           </a:xfrm>
-          <a:solidFill>
-            <a:srgbClr val="E6E6E6"/>
-          </a:solidFill>
         </p:spPr>
       </p:pic>
       <p:sp>
